--- a/ゲーム科2年/00_前期/ゲームエンジンⅢ/Unity_HDRP/00_URPとHDRP.pptx
+++ b/ゲーム科2年/00_前期/ゲームエンジンⅢ/Unity_HDRP/00_URPとHDRP.pptx
@@ -262,7 +262,7 @@
           <a:p>
             <a:fld id="{E9CC885B-4903-4D54-9A93-00025F12DED9}" type="datetimeFigureOut">
               <a:rPr kumimoji="1" lang="ja-JP" altLang="en-US" smtClean="0"/>
-              <a:t>2026/1/5</a:t>
+              <a:t>2026/1/7</a:t>
             </a:fld>
             <a:endParaRPr kumimoji="1" lang="ja-JP" altLang="en-US"/>
           </a:p>
@@ -492,7 +492,7 @@
           <a:p>
             <a:fld id="{E9CC885B-4903-4D54-9A93-00025F12DED9}" type="datetimeFigureOut">
               <a:rPr kumimoji="1" lang="ja-JP" altLang="en-US" smtClean="0"/>
-              <a:t>2026/1/5</a:t>
+              <a:t>2026/1/7</a:t>
             </a:fld>
             <a:endParaRPr kumimoji="1" lang="ja-JP" altLang="en-US"/>
           </a:p>
@@ -732,7 +732,7 @@
           <a:p>
             <a:fld id="{E9CC885B-4903-4D54-9A93-00025F12DED9}" type="datetimeFigureOut">
               <a:rPr kumimoji="1" lang="ja-JP" altLang="en-US" smtClean="0"/>
-              <a:t>2026/1/5</a:t>
+              <a:t>2026/1/7</a:t>
             </a:fld>
             <a:endParaRPr kumimoji="1" lang="ja-JP" altLang="en-US"/>
           </a:p>
@@ -962,7 +962,7 @@
           <a:p>
             <a:fld id="{E9CC885B-4903-4D54-9A93-00025F12DED9}" type="datetimeFigureOut">
               <a:rPr kumimoji="1" lang="ja-JP" altLang="en-US" smtClean="0"/>
-              <a:t>2026/1/5</a:t>
+              <a:t>2026/1/7</a:t>
             </a:fld>
             <a:endParaRPr kumimoji="1" lang="ja-JP" altLang="en-US"/>
           </a:p>
@@ -1237,7 +1237,7 @@
           <a:p>
             <a:fld id="{E9CC885B-4903-4D54-9A93-00025F12DED9}" type="datetimeFigureOut">
               <a:rPr kumimoji="1" lang="ja-JP" altLang="en-US" smtClean="0"/>
-              <a:t>2026/1/5</a:t>
+              <a:t>2026/1/7</a:t>
             </a:fld>
             <a:endParaRPr kumimoji="1" lang="ja-JP" altLang="en-US"/>
           </a:p>
@@ -1566,7 +1566,7 @@
           <a:p>
             <a:fld id="{E9CC885B-4903-4D54-9A93-00025F12DED9}" type="datetimeFigureOut">
               <a:rPr kumimoji="1" lang="ja-JP" altLang="en-US" smtClean="0"/>
-              <a:t>2026/1/5</a:t>
+              <a:t>2026/1/7</a:t>
             </a:fld>
             <a:endParaRPr kumimoji="1" lang="ja-JP" altLang="en-US"/>
           </a:p>
@@ -2042,7 +2042,7 @@
           <a:p>
             <a:fld id="{E9CC885B-4903-4D54-9A93-00025F12DED9}" type="datetimeFigureOut">
               <a:rPr kumimoji="1" lang="ja-JP" altLang="en-US" smtClean="0"/>
-              <a:t>2026/1/5</a:t>
+              <a:t>2026/1/7</a:t>
             </a:fld>
             <a:endParaRPr kumimoji="1" lang="ja-JP" altLang="en-US"/>
           </a:p>
@@ -2183,7 +2183,7 @@
           <a:p>
             <a:fld id="{E9CC885B-4903-4D54-9A93-00025F12DED9}" type="datetimeFigureOut">
               <a:rPr kumimoji="1" lang="ja-JP" altLang="en-US" smtClean="0"/>
-              <a:t>2026/1/5</a:t>
+              <a:t>2026/1/7</a:t>
             </a:fld>
             <a:endParaRPr kumimoji="1" lang="ja-JP" altLang="en-US"/>
           </a:p>
@@ -2296,7 +2296,7 @@
           <a:p>
             <a:fld id="{E9CC885B-4903-4D54-9A93-00025F12DED9}" type="datetimeFigureOut">
               <a:rPr kumimoji="1" lang="ja-JP" altLang="en-US" smtClean="0"/>
-              <a:t>2026/1/5</a:t>
+              <a:t>2026/1/7</a:t>
             </a:fld>
             <a:endParaRPr kumimoji="1" lang="ja-JP" altLang="en-US"/>
           </a:p>
@@ -2639,7 +2639,7 @@
           <a:p>
             <a:fld id="{E9CC885B-4903-4D54-9A93-00025F12DED9}" type="datetimeFigureOut">
               <a:rPr kumimoji="1" lang="ja-JP" altLang="en-US" smtClean="0"/>
-              <a:t>2026/1/5</a:t>
+              <a:t>2026/1/7</a:t>
             </a:fld>
             <a:endParaRPr kumimoji="1" lang="ja-JP" altLang="en-US"/>
           </a:p>
@@ -2927,7 +2927,7 @@
           <a:p>
             <a:fld id="{E9CC885B-4903-4D54-9A93-00025F12DED9}" type="datetimeFigureOut">
               <a:rPr kumimoji="1" lang="ja-JP" altLang="en-US" smtClean="0"/>
-              <a:t>2026/1/5</a:t>
+              <a:t>2026/1/7</a:t>
             </a:fld>
             <a:endParaRPr kumimoji="1" lang="ja-JP" altLang="en-US"/>
           </a:p>
@@ -3200,7 +3200,7 @@
           <a:p>
             <a:fld id="{E9CC885B-4903-4D54-9A93-00025F12DED9}" type="datetimeFigureOut">
               <a:rPr kumimoji="1" lang="ja-JP" altLang="en-US" smtClean="0"/>
-              <a:t>2026/1/5</a:t>
+              <a:t>2026/1/7</a:t>
             </a:fld>
             <a:endParaRPr kumimoji="1" lang="ja-JP" altLang="en-US"/>
           </a:p>
@@ -3701,6 +3701,36 @@
           </a:p>
         </p:txBody>
       </p:sp>
+      <p:pic>
+        <p:nvPicPr>
+          <p:cNvPr id="3" name="図 2">
+            <a:extLst>
+              <a:ext uri="{FF2B5EF4-FFF2-40B4-BE49-F238E27FC236}">
+                <a16:creationId xmlns:a16="http://schemas.microsoft.com/office/drawing/2014/main" id="{30B912D5-168C-4ACE-B0CF-EAA64086A878}"/>
+              </a:ext>
+            </a:extLst>
+          </p:cNvPr>
+          <p:cNvPicPr>
+            <a:picLocks noChangeAspect="1"/>
+          </p:cNvPicPr>
+          <p:nvPr/>
+        </p:nvPicPr>
+        <p:blipFill>
+          <a:blip r:embed="rId2"/>
+          <a:stretch>
+            <a:fillRect/>
+          </a:stretch>
+        </p:blipFill>
+        <p:spPr>
+          <a:xfrm>
+            <a:off x="567542" y="1817794"/>
+            <a:ext cx="8461864" cy="4548252"/>
+          </a:xfrm>
+          <a:prstGeom prst="rect">
+            <a:avLst/>
+          </a:prstGeom>
+        </p:spPr>
+      </p:pic>
     </p:spTree>
     <p:extLst>
       <p:ext uri="{BB962C8B-B14F-4D97-AF65-F5344CB8AC3E}">
@@ -4037,7 +4067,7 @@
         <p:spPr>
           <a:xfrm>
             <a:off x="567542" y="1216429"/>
-            <a:ext cx="9054082" cy="5262979"/>
+            <a:ext cx="9361858" cy="5262979"/>
           </a:xfrm>
           <a:prstGeom prst="rect">
             <a:avLst/>
@@ -4056,7 +4086,7 @@
             </a:r>
             <a:r>
               <a:rPr lang="ja-JP" altLang="en-US" sz="2400" dirty="0"/>
-              <a:t>ではリアルにするため以下の機能を使うことができます。</a:t>
+              <a:t>ではリアルにするための以下の機能を使うことができます。</a:t>
             </a:r>
             <a:endParaRPr lang="en-US" altLang="ja-JP" sz="2400" dirty="0"/>
           </a:p>
@@ -4105,7 +4135,7 @@
             </a:r>
             <a:r>
               <a:rPr lang="ja-JP" altLang="en-US" sz="2400" dirty="0"/>
-              <a:t>（光の当たるリアルな霧）</a:t>
+              <a:t>（光が当たるリアルな霧）</a:t>
             </a:r>
             <a:endParaRPr lang="en-US" altLang="ja-JP" sz="2400" dirty="0"/>
           </a:p>
@@ -4142,7 +4172,7 @@
             </a:r>
             <a:r>
               <a:rPr lang="ja-JP" altLang="en-US" sz="2400" dirty="0"/>
-              <a:t>（光を線状にトレースする描画方法）</a:t>
+              <a:t>（光線をトレースしてリアルな光表現をする手法）</a:t>
             </a:r>
             <a:endParaRPr lang="en-US" altLang="ja-JP" sz="2400" dirty="0"/>
           </a:p>
@@ -4385,7 +4415,7 @@
           <a:p>
             <a:r>
               <a:rPr lang="ja-JP" altLang="en-US" sz="2400" dirty="0"/>
-              <a:t>豪快な機能ほど、慎重に扱っていきましょう。</a:t>
+              <a:t>慎重に扱っていきましょう。</a:t>
             </a:r>
             <a:endParaRPr lang="en-US" altLang="ja-JP" sz="2400" dirty="0"/>
           </a:p>
